--- a/slides/Lecture_Reward_Engineering.pptx
+++ b/slides/Lecture_Reward_Engineering.pptx
@@ -2824,7 +2824,7 @@
           <a:p>
             <a:fld id="{2A92B22A-BE2A-43CB-B312-FF3A0A14567B}" type="datetimeFigureOut">
               <a:rPr lang="en-US" smtClean="0"/>
-              <a:t>6/3/2026</a:t>
+              <a:t>7/6/2026</a:t>
             </a:fld>
             <a:endParaRPr lang="en-US"/>
           </a:p>
@@ -3238,7 +3238,7 @@
           <a:p>
             <a:fld id="{3E22BF2E-04DA-469E-97C5-BB68A0368813}" type="datetimeFigureOut">
               <a:rPr lang="en-US" smtClean="0"/>
-              <a:t>6/3/2026</a:t>
+              <a:t>7/6/2026</a:t>
             </a:fld>
             <a:endParaRPr lang="en-US"/>
           </a:p>
@@ -3436,7 +3436,7 @@
           <a:p>
             <a:fld id="{3E22BF2E-04DA-469E-97C5-BB68A0368813}" type="datetimeFigureOut">
               <a:rPr lang="en-US" smtClean="0"/>
-              <a:t>6/3/2026</a:t>
+              <a:t>7/6/2026</a:t>
             </a:fld>
             <a:endParaRPr lang="en-US"/>
           </a:p>
@@ -3644,7 +3644,7 @@
           <a:p>
             <a:fld id="{3E22BF2E-04DA-469E-97C5-BB68A0368813}" type="datetimeFigureOut">
               <a:rPr lang="en-US" smtClean="0"/>
-              <a:t>6/3/2026</a:t>
+              <a:t>7/6/2026</a:t>
             </a:fld>
             <a:endParaRPr lang="en-US"/>
           </a:p>
@@ -3852,7 +3852,7 @@
           <a:p>
             <a:fld id="{3E22BF2E-04DA-469E-97C5-BB68A0368813}" type="datetimeFigureOut">
               <a:rPr lang="en-US" smtClean="0"/>
-              <a:t>6/3/2026</a:t>
+              <a:t>7/6/2026</a:t>
             </a:fld>
             <a:endParaRPr lang="en-US"/>
           </a:p>
@@ -4127,7 +4127,7 @@
           <a:p>
             <a:fld id="{3E22BF2E-04DA-469E-97C5-BB68A0368813}" type="datetimeFigureOut">
               <a:rPr lang="en-US" smtClean="0"/>
-              <a:t>6/3/2026</a:t>
+              <a:t>7/6/2026</a:t>
             </a:fld>
             <a:endParaRPr lang="en-US"/>
           </a:p>
@@ -4392,7 +4392,7 @@
           <a:p>
             <a:fld id="{3E22BF2E-04DA-469E-97C5-BB68A0368813}" type="datetimeFigureOut">
               <a:rPr lang="en-US" smtClean="0"/>
-              <a:t>6/3/2026</a:t>
+              <a:t>7/6/2026</a:t>
             </a:fld>
             <a:endParaRPr lang="en-US"/>
           </a:p>
@@ -4804,7 +4804,7 @@
           <a:p>
             <a:fld id="{3E22BF2E-04DA-469E-97C5-BB68A0368813}" type="datetimeFigureOut">
               <a:rPr lang="en-US" smtClean="0"/>
-              <a:t>6/3/2026</a:t>
+              <a:t>7/6/2026</a:t>
             </a:fld>
             <a:endParaRPr lang="en-US"/>
           </a:p>
@@ -4945,7 +4945,7 @@
           <a:p>
             <a:fld id="{3E22BF2E-04DA-469E-97C5-BB68A0368813}" type="datetimeFigureOut">
               <a:rPr lang="en-US" smtClean="0"/>
-              <a:t>6/3/2026</a:t>
+              <a:t>7/6/2026</a:t>
             </a:fld>
             <a:endParaRPr lang="en-US"/>
           </a:p>
@@ -5058,7 +5058,7 @@
           <a:p>
             <a:fld id="{3E22BF2E-04DA-469E-97C5-BB68A0368813}" type="datetimeFigureOut">
               <a:rPr lang="en-US" smtClean="0"/>
-              <a:t>6/3/2026</a:t>
+              <a:t>7/6/2026</a:t>
             </a:fld>
             <a:endParaRPr lang="en-US"/>
           </a:p>
@@ -5369,7 +5369,7 @@
           <a:p>
             <a:fld id="{3E22BF2E-04DA-469E-97C5-BB68A0368813}" type="datetimeFigureOut">
               <a:rPr lang="en-US" smtClean="0"/>
-              <a:t>6/3/2026</a:t>
+              <a:t>7/6/2026</a:t>
             </a:fld>
             <a:endParaRPr lang="en-US"/>
           </a:p>
@@ -5657,7 +5657,7 @@
           <a:p>
             <a:fld id="{3E22BF2E-04DA-469E-97C5-BB68A0368813}" type="datetimeFigureOut">
               <a:rPr lang="en-US" smtClean="0"/>
-              <a:t>6/3/2026</a:t>
+              <a:t>7/6/2026</a:t>
             </a:fld>
             <a:endParaRPr lang="en-US"/>
           </a:p>
@@ -5898,7 +5898,7 @@
           <a:p>
             <a:fld id="{3E22BF2E-04DA-469E-97C5-BB68A0368813}" type="datetimeFigureOut">
               <a:rPr lang="en-US" smtClean="0"/>
-              <a:t>6/3/2026</a:t>
+              <a:t>7/6/2026</a:t>
             </a:fld>
             <a:endParaRPr lang="en-US"/>
           </a:p>
@@ -7065,8 +7065,8 @@
           </a:p>
         </p:txBody>
       </p:sp>
-      <mc:AlternateContent xmlns:mc="http://schemas.openxmlformats.org/markup-compatibility/2006">
-        <mc:Choice xmlns:a14="http://schemas.microsoft.com/office/drawing/2010/main" Requires="a14">
+      <mc:AlternateContent xmlns:mc="http://schemas.openxmlformats.org/markup-compatibility/2006" xmlns:a14="http://schemas.microsoft.com/office/drawing/2010/main">
+        <mc:Choice Requires="a14">
           <p:sp>
             <p:nvSpPr>
               <p:cNvPr id="3" name="Content Placeholder 2">
@@ -7318,7 +7318,7 @@
             </p:txBody>
           </p:sp>
         </mc:Choice>
-        <mc:Fallback>
+        <mc:Fallback xmlns="">
           <p:sp>
             <p:nvSpPr>
               <p:cNvPr id="3" name="Content Placeholder 2">
@@ -7937,8 +7937,8 @@
           </a:p>
         </p:txBody>
       </p:sp>
-      <mc:AlternateContent xmlns:mc="http://schemas.openxmlformats.org/markup-compatibility/2006">
-        <mc:Choice xmlns:a14="http://schemas.microsoft.com/office/drawing/2010/main" Requires="a14">
+      <mc:AlternateContent xmlns:mc="http://schemas.openxmlformats.org/markup-compatibility/2006" xmlns:a14="http://schemas.microsoft.com/office/drawing/2010/main">
+        <mc:Choice Requires="a14">
           <p:sp>
             <p:nvSpPr>
               <p:cNvPr id="3" name="Content Placeholder 2">
@@ -8773,7 +8773,7 @@
             </p:txBody>
           </p:sp>
         </mc:Choice>
-        <mc:Fallback>
+        <mc:Fallback xmlns="">
           <p:sp>
             <p:nvSpPr>
               <p:cNvPr id="3" name="Content Placeholder 2">
@@ -10112,7 +10112,7 @@
         <p:spPr/>
         <p:txBody>
           <a:bodyPr>
-            <a:normAutofit fontScale="85000" lnSpcReduction="20000"/>
+            <a:normAutofit fontScale="70000" lnSpcReduction="20000"/>
           </a:bodyPr>
           <a:lstStyle/>
           <a:p>
@@ -10198,7 +10198,7 @@
           <a:p>
             <a:r>
               <a:rPr lang="en-US" dirty="0"/>
-              <a:t>Part III: Modern RL Methods</a:t>
+              <a:t>Part III: Looking Deeper</a:t>
             </a:r>
           </a:p>
           <a:p>
@@ -10212,60 +10212,21 @@
             <a:pPr lvl="1"/>
             <a:r>
               <a:rPr lang="en-US" dirty="0"/>
+              <a:t>Partial Observability</a:t>
+            </a:r>
+          </a:p>
+          <a:p>
+            <a:pPr lvl="1"/>
+            <a:r>
+              <a:rPr lang="en-US" b="1" dirty="0"/>
+              <a:t>Reward Engineering</a:t>
+            </a:r>
+          </a:p>
+          <a:p>
+            <a:pPr lvl="1"/>
+            <a:r>
+              <a:rPr lang="en-US" dirty="0"/>
               <a:t>Current Applications</a:t>
-            </a:r>
-          </a:p>
-        </p:txBody>
-      </p:sp>
-      <p:sp>
-        <p:nvSpPr>
-          <p:cNvPr id="4" name="TextBox 3">
-            <a:extLst>
-              <a:ext uri="{FF2B5EF4-FFF2-40B4-BE49-F238E27FC236}">
-                <a16:creationId xmlns:a16="http://schemas.microsoft.com/office/drawing/2014/main" id="{3DBF7C58-8727-0C44-98A1-406253404373}"/>
-              </a:ext>
-            </a:extLst>
-          </p:cNvPr>
-          <p:cNvSpPr txBox="1"/>
-          <p:nvPr/>
-        </p:nvSpPr>
-        <p:spPr>
-          <a:xfrm rot="2438598">
-            <a:off x="214349" y="3278585"/>
-            <a:ext cx="6258468" cy="830997"/>
-          </a:xfrm>
-          <a:prstGeom prst="rect">
-            <a:avLst/>
-          </a:prstGeom>
-        </p:spPr>
-        <p:style>
-          <a:lnRef idx="2">
-            <a:schemeClr val="dk1"/>
-          </a:lnRef>
-          <a:fillRef idx="1">
-            <a:schemeClr val="lt1"/>
-          </a:fillRef>
-          <a:effectRef idx="0">
-            <a:schemeClr val="dk1"/>
-          </a:effectRef>
-          <a:fontRef idx="minor">
-            <a:schemeClr val="dk1"/>
-          </a:fontRef>
-        </p:style>
-        <p:txBody>
-          <a:bodyPr wrap="square" rtlCol="0">
-            <a:spAutoFit/>
-          </a:bodyPr>
-          <a:lstStyle/>
-          <a:p>
-            <a:pPr algn="ctr"/>
-            <a:r>
-              <a:rPr lang="en-US" sz="4800" b="1" dirty="0">
-                <a:solidFill>
-                  <a:srgbClr val="FF0000"/>
-                </a:solidFill>
-              </a:rPr>
-              <a:t>Reward Engineering</a:t>
             </a:r>
           </a:p>
         </p:txBody>
@@ -11831,8 +11792,8 @@
           </a:p>
         </p:txBody>
       </p:sp>
-      <mc:AlternateContent xmlns:mc="http://schemas.openxmlformats.org/markup-compatibility/2006">
-        <mc:Choice xmlns:a14="http://schemas.microsoft.com/office/drawing/2010/main" Requires="a14">
+      <mc:AlternateContent xmlns:mc="http://schemas.openxmlformats.org/markup-compatibility/2006" xmlns:a14="http://schemas.microsoft.com/office/drawing/2010/main">
+        <mc:Choice Requires="a14">
           <p:sp>
             <p:nvSpPr>
               <p:cNvPr id="3" name="Content Placeholder 2">
@@ -12141,7 +12102,7 @@
             </p:txBody>
           </p:sp>
         </mc:Choice>
-        <mc:Fallback>
+        <mc:Fallback xmlns="">
           <p:sp>
             <p:nvSpPr>
               <p:cNvPr id="3" name="Content Placeholder 2">
@@ -12420,8 +12381,8 @@
                 </p:sp>
               </mc:Fallback>
             </mc:AlternateContent>
-            <mc:AlternateContent xmlns:mc="http://schemas.openxmlformats.org/markup-compatibility/2006">
-              <mc:Choice xmlns:a14="http://schemas.microsoft.com/office/drawing/2010/main" Requires="a14">
+            <mc:AlternateContent xmlns:mc="http://schemas.openxmlformats.org/markup-compatibility/2006" xmlns:a14="http://schemas.microsoft.com/office/drawing/2010/main">
+              <mc:Choice Requires="a14">
                 <p:sp>
                   <p:nvSpPr>
                     <p:cNvPr id="25" name="TextBox 24">
@@ -12499,7 +12460,7 @@
                   </p:txBody>
                 </p:sp>
               </mc:Choice>
-              <mc:Fallback>
+              <mc:Fallback xmlns="">
                 <p:sp>
                   <p:nvSpPr>
                     <p:cNvPr id="25" name="TextBox 24">
@@ -13104,8 +13065,8 @@
           </p:txBody>
         </p:sp>
       </p:grpSp>
-      <mc:AlternateContent xmlns:mc="http://schemas.openxmlformats.org/markup-compatibility/2006">
-        <mc:Choice xmlns:a14="http://schemas.microsoft.com/office/drawing/2010/main" Requires="a14">
+      <mc:AlternateContent xmlns:mc="http://schemas.openxmlformats.org/markup-compatibility/2006" xmlns:a14="http://schemas.microsoft.com/office/drawing/2010/main">
+        <mc:Choice Requires="a14">
           <p:sp>
             <p:nvSpPr>
               <p:cNvPr id="31" name="TextBox 30">
@@ -13194,7 +13155,7 @@
             </p:txBody>
           </p:sp>
         </mc:Choice>
-        <mc:Fallback>
+        <mc:Fallback xmlns="">
           <p:sp>
             <p:nvSpPr>
               <p:cNvPr id="31" name="TextBox 30">
@@ -13239,8 +13200,8 @@
           </p:sp>
         </mc:Fallback>
       </mc:AlternateContent>
-      <mc:AlternateContent xmlns:mc="http://schemas.openxmlformats.org/markup-compatibility/2006">
-        <mc:Choice xmlns:a14="http://schemas.microsoft.com/office/drawing/2010/main" Requires="a14">
+      <mc:AlternateContent xmlns:mc="http://schemas.openxmlformats.org/markup-compatibility/2006" xmlns:a14="http://schemas.microsoft.com/office/drawing/2010/main">
+        <mc:Choice Requires="a14">
           <p:sp>
             <p:nvSpPr>
               <p:cNvPr id="34" name="Thought Bubble: Cloud 33">
@@ -13344,7 +13305,7 @@
             </p:txBody>
           </p:sp>
         </mc:Choice>
-        <mc:Fallback>
+        <mc:Fallback xmlns="">
           <p:sp>
             <p:nvSpPr>
               <p:cNvPr id="34" name="Thought Bubble: Cloud 33">
@@ -13668,8 +13629,8 @@
           </a:p>
         </p:txBody>
       </p:sp>
-      <mc:AlternateContent xmlns:mc="http://schemas.openxmlformats.org/markup-compatibility/2006">
-        <mc:Choice xmlns:a14="http://schemas.microsoft.com/office/drawing/2010/main" Requires="a14">
+      <mc:AlternateContent xmlns:mc="http://schemas.openxmlformats.org/markup-compatibility/2006" xmlns:a14="http://schemas.microsoft.com/office/drawing/2010/main">
+        <mc:Choice Requires="a14">
           <p:sp>
             <p:nvSpPr>
               <p:cNvPr id="3" name="Content Placeholder 2">
@@ -14187,7 +14148,7 @@
             </p:txBody>
           </p:sp>
         </mc:Choice>
-        <mc:Fallback>
+        <mc:Fallback xmlns="">
           <p:sp>
             <p:nvSpPr>
               <p:cNvPr id="3" name="Content Placeholder 2">
@@ -14487,8 +14448,8 @@
               </a:fontRef>
             </p:style>
           </p:cxnSp>
-          <mc:AlternateContent xmlns:mc="http://schemas.openxmlformats.org/markup-compatibility/2006">
-            <mc:Choice xmlns:a14="http://schemas.microsoft.com/office/drawing/2010/main" Requires="a14">
+          <mc:AlternateContent xmlns:mc="http://schemas.openxmlformats.org/markup-compatibility/2006" xmlns:a14="http://schemas.microsoft.com/office/drawing/2010/main">
+            <mc:Choice Requires="a14">
               <p:sp>
                 <p:nvSpPr>
                   <p:cNvPr id="11" name="TextBox 10">
@@ -14517,6 +14478,7 @@
                   </a:bodyPr>
                   <a:lstStyle/>
                   <a:p>
+                    <a:pPr/>
                     <a14:m>
                       <m:oMathPara xmlns:m="http://schemas.openxmlformats.org/officeDocument/2006/math">
                         <m:oMathParaPr>
@@ -14556,7 +14518,7 @@
                 </p:txBody>
               </p:sp>
             </mc:Choice>
-            <mc:Fallback>
+            <mc:Fallback xmlns="">
               <p:sp>
                 <p:nvSpPr>
                   <p:cNvPr id="11" name="TextBox 10">
@@ -14601,8 +14563,8 @@
               </p:sp>
             </mc:Fallback>
           </mc:AlternateContent>
-          <mc:AlternateContent xmlns:mc="http://schemas.openxmlformats.org/markup-compatibility/2006">
-            <mc:Choice xmlns:a14="http://schemas.microsoft.com/office/drawing/2010/main" Requires="a14">
+          <mc:AlternateContent xmlns:mc="http://schemas.openxmlformats.org/markup-compatibility/2006" xmlns:a14="http://schemas.microsoft.com/office/drawing/2010/main">
+            <mc:Choice Requires="a14">
               <p:sp>
                 <p:nvSpPr>
                   <p:cNvPr id="12" name="TextBox 11">
@@ -14631,6 +14593,7 @@
                   </a:bodyPr>
                   <a:lstStyle/>
                   <a:p>
+                    <a:pPr/>
                     <a14:m>
                       <m:oMathPara xmlns:m="http://schemas.openxmlformats.org/officeDocument/2006/math">
                         <m:oMathParaPr>
@@ -14693,7 +14656,7 @@
                 </p:txBody>
               </p:sp>
             </mc:Choice>
-            <mc:Fallback>
+            <mc:Fallback xmlns="">
               <p:sp>
                 <p:nvSpPr>
                   <p:cNvPr id="12" name="TextBox 11">
@@ -14891,8 +14854,8 @@
           </a:p>
         </p:txBody>
       </p:sp>
-      <mc:AlternateContent xmlns:mc="http://schemas.openxmlformats.org/markup-compatibility/2006">
-        <mc:Choice xmlns:a14="http://schemas.microsoft.com/office/drawing/2010/main" Requires="a14">
+      <mc:AlternateContent xmlns:mc="http://schemas.openxmlformats.org/markup-compatibility/2006" xmlns:a14="http://schemas.microsoft.com/office/drawing/2010/main">
+        <mc:Choice Requires="a14">
           <p:sp>
             <p:nvSpPr>
               <p:cNvPr id="3" name="Content Placeholder 2">
@@ -15281,7 +15244,7 @@
             </p:txBody>
           </p:sp>
         </mc:Choice>
-        <mc:Fallback>
+        <mc:Fallback xmlns="">
           <p:sp>
             <p:nvSpPr>
               <p:cNvPr id="3" name="Content Placeholder 2">
@@ -15420,8 +15383,8 @@
           </p:txBody>
         </p:sp>
       </p:grpSp>
-      <mc:AlternateContent xmlns:mc="http://schemas.openxmlformats.org/markup-compatibility/2006">
-        <mc:Choice xmlns:a14="http://schemas.microsoft.com/office/drawing/2010/main" Requires="a14">
+      <mc:AlternateContent xmlns:mc="http://schemas.openxmlformats.org/markup-compatibility/2006" xmlns:a14="http://schemas.microsoft.com/office/drawing/2010/main">
+        <mc:Choice Requires="a14">
           <p:sp>
             <p:nvSpPr>
               <p:cNvPr id="25" name="TextBox 24">
@@ -15506,7 +15469,7 @@
             </p:txBody>
           </p:sp>
         </mc:Choice>
-        <mc:Fallback>
+        <mc:Fallback xmlns="">
           <p:sp>
             <p:nvSpPr>
               <p:cNvPr id="25" name="TextBox 24">
